--- a/paper_plots/ppt23_yao_2023.pptx
+++ b/paper_plots/ppt23_yao_2023.pptx
@@ -243,7 +243,7 @@
           <a:p>
             <a:fld id="{EC25FAA8-77F2-5C42-A9DC-2A9BDE3DA24F}" type="datetimeFigureOut">
               <a:rPr lang="en-US" smtClean="0"/>
-              <a:t>9/2/25</a:t>
+              <a:t>9/10/25</a:t>
             </a:fld>
             <a:endParaRPr lang="en-US"/>
           </a:p>
@@ -413,7 +413,7 @@
           <a:p>
             <a:fld id="{EC25FAA8-77F2-5C42-A9DC-2A9BDE3DA24F}" type="datetimeFigureOut">
               <a:rPr lang="en-US" smtClean="0"/>
-              <a:t>9/2/25</a:t>
+              <a:t>9/10/25</a:t>
             </a:fld>
             <a:endParaRPr lang="en-US"/>
           </a:p>
@@ -593,7 +593,7 @@
           <a:p>
             <a:fld id="{EC25FAA8-77F2-5C42-A9DC-2A9BDE3DA24F}" type="datetimeFigureOut">
               <a:rPr lang="en-US" smtClean="0"/>
-              <a:t>9/2/25</a:t>
+              <a:t>9/10/25</a:t>
             </a:fld>
             <a:endParaRPr lang="en-US"/>
           </a:p>
@@ -763,7 +763,7 @@
           <a:p>
             <a:fld id="{EC25FAA8-77F2-5C42-A9DC-2A9BDE3DA24F}" type="datetimeFigureOut">
               <a:rPr lang="en-US" smtClean="0"/>
-              <a:t>9/2/25</a:t>
+              <a:t>9/10/25</a:t>
             </a:fld>
             <a:endParaRPr lang="en-US"/>
           </a:p>
@@ -1009,7 +1009,7 @@
           <a:p>
             <a:fld id="{EC25FAA8-77F2-5C42-A9DC-2A9BDE3DA24F}" type="datetimeFigureOut">
               <a:rPr lang="en-US" smtClean="0"/>
-              <a:t>9/2/25</a:t>
+              <a:t>9/10/25</a:t>
             </a:fld>
             <a:endParaRPr lang="en-US"/>
           </a:p>
@@ -1241,7 +1241,7 @@
           <a:p>
             <a:fld id="{EC25FAA8-77F2-5C42-A9DC-2A9BDE3DA24F}" type="datetimeFigureOut">
               <a:rPr lang="en-US" smtClean="0"/>
-              <a:t>9/2/25</a:t>
+              <a:t>9/10/25</a:t>
             </a:fld>
             <a:endParaRPr lang="en-US"/>
           </a:p>
@@ -1608,7 +1608,7 @@
           <a:p>
             <a:fld id="{EC25FAA8-77F2-5C42-A9DC-2A9BDE3DA24F}" type="datetimeFigureOut">
               <a:rPr lang="en-US" smtClean="0"/>
-              <a:t>9/2/25</a:t>
+              <a:t>9/10/25</a:t>
             </a:fld>
             <a:endParaRPr lang="en-US"/>
           </a:p>
@@ -1726,7 +1726,7 @@
           <a:p>
             <a:fld id="{EC25FAA8-77F2-5C42-A9DC-2A9BDE3DA24F}" type="datetimeFigureOut">
               <a:rPr lang="en-US" smtClean="0"/>
-              <a:t>9/2/25</a:t>
+              <a:t>9/10/25</a:t>
             </a:fld>
             <a:endParaRPr lang="en-US"/>
           </a:p>
@@ -1821,7 +1821,7 @@
           <a:p>
             <a:fld id="{EC25FAA8-77F2-5C42-A9DC-2A9BDE3DA24F}" type="datetimeFigureOut">
               <a:rPr lang="en-US" smtClean="0"/>
-              <a:t>9/2/25</a:t>
+              <a:t>9/10/25</a:t>
             </a:fld>
             <a:endParaRPr lang="en-US"/>
           </a:p>
@@ -2098,7 +2098,7 @@
           <a:p>
             <a:fld id="{EC25FAA8-77F2-5C42-A9DC-2A9BDE3DA24F}" type="datetimeFigureOut">
               <a:rPr lang="en-US" smtClean="0"/>
-              <a:t>9/2/25</a:t>
+              <a:t>9/10/25</a:t>
             </a:fld>
             <a:endParaRPr lang="en-US"/>
           </a:p>
@@ -2355,7 +2355,7 @@
           <a:p>
             <a:fld id="{EC25FAA8-77F2-5C42-A9DC-2A9BDE3DA24F}" type="datetimeFigureOut">
               <a:rPr lang="en-US" smtClean="0"/>
-              <a:t>9/2/25</a:t>
+              <a:t>9/10/25</a:t>
             </a:fld>
             <a:endParaRPr lang="en-US"/>
           </a:p>
@@ -2568,7 +2568,7 @@
           <a:p>
             <a:fld id="{EC25FAA8-77F2-5C42-A9DC-2A9BDE3DA24F}" type="datetimeFigureOut">
               <a:rPr lang="en-US" smtClean="0"/>
-              <a:t>9/2/25</a:t>
+              <a:t>9/10/25</a:t>
             </a:fld>
             <a:endParaRPr lang="en-US"/>
           </a:p>
@@ -5441,66 +5441,6 @@
           </a:p>
         </p:txBody>
       </p:sp>
-      <p:pic>
-        <p:nvPicPr>
-          <p:cNvPr id="3" name="Picture 2">
-            <a:extLst>
-              <a:ext uri="{FF2B5EF4-FFF2-40B4-BE49-F238E27FC236}">
-                <a16:creationId xmlns:a16="http://schemas.microsoft.com/office/drawing/2014/main" id="{4A2A8227-0282-9533-A1D0-E298383E3F02}"/>
-              </a:ext>
-            </a:extLst>
-          </p:cNvPr>
-          <p:cNvPicPr>
-            <a:picLocks noChangeAspect="1"/>
-          </p:cNvPicPr>
-          <p:nvPr/>
-        </p:nvPicPr>
-        <p:blipFill>
-          <a:blip r:embed="rId2"/>
-          <a:stretch>
-            <a:fillRect/>
-          </a:stretch>
-        </p:blipFill>
-        <p:spPr>
-          <a:xfrm>
-            <a:off x="480317" y="114300"/>
-            <a:ext cx="7772400" cy="5829300"/>
-          </a:xfrm>
-          <a:prstGeom prst="rect">
-            <a:avLst/>
-          </a:prstGeom>
-        </p:spPr>
-      </p:pic>
-      <p:pic>
-        <p:nvPicPr>
-          <p:cNvPr id="6" name="Picture 5">
-            <a:extLst>
-              <a:ext uri="{FF2B5EF4-FFF2-40B4-BE49-F238E27FC236}">
-                <a16:creationId xmlns:a16="http://schemas.microsoft.com/office/drawing/2014/main" id="{5CFCF177-1A4B-0DD7-8EBE-E554AF9F4290}"/>
-              </a:ext>
-            </a:extLst>
-          </p:cNvPr>
-          <p:cNvPicPr>
-            <a:picLocks noChangeAspect="1"/>
-          </p:cNvPicPr>
-          <p:nvPr/>
-        </p:nvPicPr>
-        <p:blipFill>
-          <a:blip r:embed="rId3"/>
-          <a:stretch>
-            <a:fillRect/>
-          </a:stretch>
-        </p:blipFill>
-        <p:spPr>
-          <a:xfrm>
-            <a:off x="480317" y="5943600"/>
-            <a:ext cx="7772400" cy="5829300"/>
-          </a:xfrm>
-          <a:prstGeom prst="rect">
-            <a:avLst/>
-          </a:prstGeom>
-        </p:spPr>
-      </p:pic>
       <p:sp>
         <p:nvSpPr>
           <p:cNvPr id="7" name="Oval 6">
@@ -6193,6 +6133,66 @@
           </a:p>
         </p:txBody>
       </p:sp>
+      <p:pic>
+        <p:nvPicPr>
+          <p:cNvPr id="4" name="Picture 3">
+            <a:extLst>
+              <a:ext uri="{FF2B5EF4-FFF2-40B4-BE49-F238E27FC236}">
+                <a16:creationId xmlns:a16="http://schemas.microsoft.com/office/drawing/2014/main" id="{F9ACDE68-F77B-8E92-2B6D-3188BA2C5416}"/>
+              </a:ext>
+            </a:extLst>
+          </p:cNvPr>
+          <p:cNvPicPr>
+            <a:picLocks noChangeAspect="1"/>
+          </p:cNvPicPr>
+          <p:nvPr/>
+        </p:nvPicPr>
+        <p:blipFill>
+          <a:blip r:embed="rId2"/>
+          <a:stretch>
+            <a:fillRect/>
+          </a:stretch>
+        </p:blipFill>
+        <p:spPr>
+          <a:xfrm>
+            <a:off x="439778" y="207248"/>
+            <a:ext cx="7772400" cy="5829300"/>
+          </a:xfrm>
+          <a:prstGeom prst="rect">
+            <a:avLst/>
+          </a:prstGeom>
+        </p:spPr>
+      </p:pic>
+      <p:pic>
+        <p:nvPicPr>
+          <p:cNvPr id="10" name="Picture 9">
+            <a:extLst>
+              <a:ext uri="{FF2B5EF4-FFF2-40B4-BE49-F238E27FC236}">
+                <a16:creationId xmlns:a16="http://schemas.microsoft.com/office/drawing/2014/main" id="{58FF41EA-CFD2-3515-1B46-386B25127849}"/>
+              </a:ext>
+            </a:extLst>
+          </p:cNvPr>
+          <p:cNvPicPr>
+            <a:picLocks noChangeAspect="1"/>
+          </p:cNvPicPr>
+          <p:nvPr/>
+        </p:nvPicPr>
+        <p:blipFill>
+          <a:blip r:embed="rId3"/>
+          <a:stretch>
+            <a:fillRect/>
+          </a:stretch>
+        </p:blipFill>
+        <p:spPr>
+          <a:xfrm>
+            <a:off x="459862" y="6008130"/>
+            <a:ext cx="7772400" cy="5829300"/>
+          </a:xfrm>
+          <a:prstGeom prst="rect">
+            <a:avLst/>
+          </a:prstGeom>
+        </p:spPr>
+      </p:pic>
     </p:spTree>
     <p:extLst>
       <p:ext uri="{BB962C8B-B14F-4D97-AF65-F5344CB8AC3E}">
